--- a/제안서/IT_TOP10_스마트액티브레버리지15_v1_20260812.pptx
+++ b/제안서/IT_TOP10_스마트액티브레버리지15_v1_20260812.pptx
@@ -17772,7 +17772,7 @@
                 <a:latin typeface="KoPub돋움체_Pro Medium" panose="02020603020101020101" pitchFamily="18" charset="-127"/>
                 <a:ea typeface="KoPub돋움체_Pro Medium" panose="02020603020101020101" pitchFamily="18" charset="-127"/>
               </a:rPr>
-              <a:t>미래에셋변동성하베스트일반사모투자신탁</a:t>
+              <a:t>미래에셋 IT TOP10 스마트 액티브 레버리지 1.5 제안서</a:t>
             </a:r>
             <a:r>
               <a:rPr lang="ko-KR" altLang="en-US" sz="800" baseline="0" dirty="0">
@@ -17782,7 +17782,7 @@
                 <a:latin typeface="KoPub돋움체_Pro Medium" panose="02020603020101020101" pitchFamily="18" charset="-127"/>
                 <a:ea typeface="KoPub돋움체_Pro Medium" panose="02020603020101020101" pitchFamily="18" charset="-127"/>
               </a:rPr>
-              <a:t> 제안서</a:t>
+              <a:t/>
             </a:r>
             <a:endParaRPr lang="en-US" altLang="ko-KR" sz="800" baseline="0" dirty="0">
               <a:solidFill>

--- a/제안서/IT_TOP10_스마트액티브레버리지15_v1_20260812.pptx
+++ b/제안서/IT_TOP10_스마트액티브레버리지15_v1_20260812.pptx
@@ -23914,29 +23914,29 @@
                   <a:srgbClr val="222222"/>
                 </a:solidFill>
               </a:rPr>
-              <a:t>기간이 길수록 잠식은 커집니다 — KOSPI200이 4년 5개월 걸려 제자리로 왔을 때 레버리지는 -27.1%, 하이닉스 레버리지 ETF는 6주 왕복만으로 -18.8%.</a:t>
+              <a:t>기간이 길수록 잠식은 커집니다 — ① KOSPI200이 4년 5개월 걸려 제자리로 왔을 때 레버리지는 -27.1%  ② 하이닉스 레버리지는 출시 5주 뒤 주가가 +7.4% 올랐는데도 출시가로 회귀  ③ 왕복 5주 만에 -15.2%.</a:t>
             </a:r>
           </a:p>
         </p:txBody>
       </p:sp>
       <p:pic>
         <p:nvPicPr>
-          <p:cNvPr id="4" name="Picture 3" descr="image.png"/>
+          <p:cNvPr id="4" name="Picture 3" descr="lev15_long_k200.png"/>
           <p:cNvPicPr>
             <a:picLocks noChangeAspect="1"/>
           </p:cNvPicPr>
           <p:nvPr/>
         </p:nvPicPr>
         <p:blipFill>
-          <a:blip r:embed="rId5"/>
+          <a:blip r:embed="rId7"/>
           <a:stretch>
             <a:fillRect/>
           </a:stretch>
         </p:blipFill>
         <p:spPr>
           <a:xfrm>
-            <a:off x="320040" y="1874519"/>
-            <a:ext cx="4709160" cy="3036695"/>
+            <a:off x="411480" y="1783080"/>
+            <a:ext cx="2942336" cy="2677169"/>
           </a:xfrm>
           <a:prstGeom prst="rect">
             <a:avLst/>
@@ -23945,31 +23945,55 @@
       </p:pic>
       <p:pic>
         <p:nvPicPr>
-          <p:cNvPr id="5" name="Picture 4" descr="image.png"/>
+          <p:cNvPr id="5" name="Picture 4" descr="lev15_hynix_a.png"/>
           <p:cNvPicPr>
             <a:picLocks noChangeAspect="1"/>
           </p:cNvPicPr>
           <p:nvPr/>
         </p:nvPicPr>
         <p:blipFill>
-          <a:blip r:embed="rId6"/>
+          <a:blip r:embed="rId8"/>
           <a:stretch>
             <a:fillRect/>
           </a:stretch>
         </p:blipFill>
         <p:spPr>
           <a:xfrm>
-            <a:off x="5138928" y="1874519"/>
-            <a:ext cx="4709160" cy="3036695"/>
+            <a:off x="3481832" y="1783080"/>
+            <a:ext cx="2942336" cy="2677169"/>
           </a:xfrm>
           <a:prstGeom prst="rect">
             <a:avLst/>
           </a:prstGeom>
         </p:spPr>
       </p:pic>
-      <p:sp>
-        <p:nvSpPr>
-          <p:cNvPr id="6" name="TextBox 5"/>
+      <p:pic>
+        <p:nvPicPr>
+          <p:cNvPr id="6" name="Picture 5" descr="lev15_hynix_b.png"/>
+          <p:cNvPicPr>
+            <a:picLocks noChangeAspect="1"/>
+          </p:cNvPicPr>
+          <p:nvPr/>
+        </p:nvPicPr>
+        <p:blipFill>
+          <a:blip r:embed="rId9"/>
+          <a:stretch>
+            <a:fillRect/>
+          </a:stretch>
+        </p:blipFill>
+        <p:spPr>
+          <a:xfrm>
+            <a:off x="6552184" y="1783080"/>
+            <a:ext cx="2942336" cy="2677169"/>
+          </a:xfrm>
+          <a:prstGeom prst="rect">
+            <a:avLst/>
+          </a:prstGeom>
+        </p:spPr>
+      </p:pic>
+      <p:sp>
+        <p:nvSpPr>
+          <p:cNvPr id="7" name="TextBox 6"/>
           <p:cNvSpPr txBox="1"/>
           <p:nvPr/>
         </p:nvSpPr>
@@ -24008,7 +24032,7 @@
       </p:sp>
       <p:sp>
         <p:nvSpPr>
-          <p:cNvPr id="7" name="TextBox 6"/>
+          <p:cNvPr id="8" name="TextBox 7"/>
           <p:cNvSpPr txBox="1"/>
           <p:nvPr/>
         </p:nvSpPr>
@@ -24040,7 +24064,7 @@
                 </a:solidFill>
                 <a:latin typeface="KoPub돋움체_Pro Medium"/>
               </a:rPr>
-              <a:t>※ 수정주가 기준 실측 · KODEX 200/KODEX 레버리지, KODEX SK하이닉스단일종목레버리지 · SK하이닉스 주가는 레버리지 ETF 일별수익률÷2로 역산 · 데이터: ETF데이터 · 상기 자료는 이해를 돕기 위한 예시입니다.</a:t>
+              <a:t>※ 수정주가 기준 실측 · KODEX 200/KODEX 레버리지, KODEX SK하이닉스단일종목레버리지 (2026.05.27 상장) · SK하이닉스 주가는 레버리지 ETF 일별수익률÷2로 역산 · 데이터: ETF데이터 · 상기 자료는 이해를 돕기 위한 예시입니다.</a:t>
             </a:r>
           </a:p>
         </p:txBody>
@@ -24115,7 +24139,7 @@
                 </a:solidFill>
                 <a:latin typeface="KoPub돋움체_Pro Bold"/>
               </a:rPr>
-              <a:t>투자자가 모르는 사실 ① : 왕복이면 반드시 잃고, 추세면 더 번다</a:t>
+              <a:t>투자자가 모르는 사실 ① : 방향이 없어도 원금이 깎인다 — 변동성 잠식</a:t>
             </a:r>
           </a:p>
         </p:txBody>
@@ -24153,7 +24177,7 @@
                   <a:srgbClr val="222222"/>
                 </a:solidFill>
               </a:rPr>
-              <a:t>지수가 2배 올랐다 제자리로 오면 레버리지는 0이 됩니다. 실측으로도 하루 +24% 급등 직후 이틀 만에 -2.3%p 잠식. 그러나 추세 상승장에서는 복리 효과로 단순 2배보다 +752%p 더 벌었습니다.</a:t>
+              <a:t>레버리지는 '일별 수익률의 2배(1.5배)'를 맞추려 매일 오른 날 더 사고(고가 매수) 내린 날 팝니다(저가 매도). 지수가 2배 갔다 제자리면 0이 되고, 하루 +10% 갔다 제자리만 와도 -1.8% — 이 손실이 등락마다 복리로 쌓입니다.</a:t>
             </a:r>
           </a:p>
         </p:txBody>
@@ -24184,14 +24208,14 @@
       </p:pic>
       <p:pic>
         <p:nvPicPr>
-          <p:cNvPr id="5" name="Picture 4" descr="image.png"/>
+          <p:cNvPr id="5" name="Picture 4" descr="lev15_k200flat.png"/>
           <p:cNvPicPr>
             <a:picLocks noChangeAspect="1"/>
           </p:cNvPicPr>
           <p:nvPr/>
         </p:nvPicPr>
         <p:blipFill>
-          <a:blip r:embed="rId5"/>
+          <a:blip r:embed="rId7"/>
           <a:stretch>
             <a:fillRect/>
           </a:stretch>
@@ -24199,7 +24223,7 @@
         <p:spPr>
           <a:xfrm>
             <a:off x="3481832" y="1783080"/>
-            <a:ext cx="2942336" cy="2783291"/>
+            <a:ext cx="2942336" cy="2677169"/>
           </a:xfrm>
           <a:prstGeom prst="rect">
             <a:avLst/>
@@ -24208,14 +24232,14 @@
       </p:pic>
       <p:pic>
         <p:nvPicPr>
-          <p:cNvPr id="6" name="Picture 5" descr="image.png"/>
+          <p:cNvPr id="6" name="Picture 5" descr="lev15_k200trend.png"/>
           <p:cNvPicPr>
             <a:picLocks noChangeAspect="1"/>
           </p:cNvPicPr>
           <p:nvPr/>
         </p:nvPicPr>
         <p:blipFill>
-          <a:blip r:embed="rId6"/>
+          <a:blip r:embed="rId8"/>
           <a:stretch>
             <a:fillRect/>
           </a:stretch>
@@ -24223,7 +24247,7 @@
         <p:spPr>
           <a:xfrm>
             <a:off x="6552184" y="1783080"/>
-            <a:ext cx="2942336" cy="2783291"/>
+            <a:ext cx="2942336" cy="2677169"/>
           </a:xfrm>
           <a:prstGeom prst="rect">
             <a:avLst/>
@@ -24264,7 +24288,7 @@
                 </a:solidFill>
                 <a:latin typeface="KoPub돋움체_Pro Bold"/>
               </a:rPr>
-              <a:t>왕복장에서는 반드시 잃고, 추세장에서는 더 법니다 — 문제는 '언제 왕복할지 알 수 없다'는 것입니다.</a:t>
+              <a:t>등락 반복에선 지수가 제자리여도 녹아내리고, 강하고 꾸준한 추세일 때만 진가 — 문제는 그런 추세가 드물다는 것입니다.</a:t>
             </a:r>
           </a:p>
         </p:txBody>
@@ -24303,7 +24327,7 @@
                 </a:solidFill>
                 <a:latin typeface="KoPub돋움체_Pro Medium"/>
               </a:rPr>
-              <a:t>※ KODEX 200·KODEX 레버리지 수정주가 실측 (급등 사례 2026.07.31~08.03, 추세 사례 2025.04.30~2026.06.22) · 단순 2배 = 기초 누적수익률×2 (가상) · 참고: 2020.03~2021.01 추세장에서도 복리 효과 +110%p · 데이터: ETF데이터</a:t>
+              <a:t>※ KODEX 200·KODEX 레버리지 수정주가 실측 (제자리 사례 2026.02.26~04.16, 추세 사례 2026.03.31~05.29) · 단순 2배 = 기초 누적수익률×2 (가상) · '하루 +10% 후 제자리 = -1.8%'는 2배 레버리지 산술 예시 · 데이터: ETF데이터</a:t>
             </a:r>
           </a:p>
         </p:txBody>

--- a/제안서/IT_TOP10_스마트액티브레버리지15_v1_20260812.pptx
+++ b/제안서/IT_TOP10_스마트액티브레버리지15_v1_20260812.pptx
@@ -23914,14 +23914,14 @@
                   <a:srgbClr val="222222"/>
                 </a:solidFill>
               </a:rPr>
-              <a:t>기간이 길수록 잠식은 커집니다 — ① KOSPI200이 4년 5개월 걸려 제자리로 왔을 때 레버리지는 -27.1%  ② 하이닉스 레버리지는 출시 5주 뒤 주가가 +7.4% 올랐는데도 출시가로 회귀  ③ 왕복 5주 만에 -15.2%.</a:t>
+              <a:t>기간이 길수록 잠식은 커집니다 — ① KOSPI200이 4년 5개월 걸려 제자리로 왔을 때 레버리지는 -27.1%  ② KODEX 하이닉스 레버리지는 출시 6주 뒤 주가 보합(-1.9%)인데 -20.3%  ③ 주가 제자리(+0.3%) 왕복 5주 만에 -15.2%.</a:t>
             </a:r>
           </a:p>
         </p:txBody>
       </p:sp>
       <p:pic>
         <p:nvPicPr>
-          <p:cNvPr id="4" name="Picture 3" descr="lev15_long_k200.png"/>
+          <p:cNvPr id="4" name="Picture 3" descr="image.png"/>
           <p:cNvPicPr>
             <a:picLocks noChangeAspect="1"/>
           </p:cNvPicPr>
@@ -23945,14 +23945,14 @@
       </p:pic>
       <p:pic>
         <p:nvPicPr>
-          <p:cNvPr id="5" name="Picture 4" descr="lev15_hynix_a.png"/>
+          <p:cNvPr id="5" name="Picture 4" descr="image.png"/>
           <p:cNvPicPr>
             <a:picLocks noChangeAspect="1"/>
           </p:cNvPicPr>
           <p:nvPr/>
         </p:nvPicPr>
         <p:blipFill>
-          <a:blip r:embed="rId8"/>
+          <a:blip r:embed="rId12"/>
           <a:stretch>
             <a:fillRect/>
           </a:stretch>
@@ -23976,7 +23976,7 @@
           <p:nvPr/>
         </p:nvPicPr>
         <p:blipFill>
-          <a:blip r:embed="rId9"/>
+          <a:blip r:embed="rId14"/>
           <a:stretch>
             <a:fillRect/>
           </a:stretch>
@@ -24064,7 +24064,7 @@
                 </a:solidFill>
                 <a:latin typeface="KoPub돋움체_Pro Medium"/>
               </a:rPr>
-              <a:t>※ 수정주가 기준 실측 · KODEX 200/KODEX 레버리지, KODEX SK하이닉스단일종목레버리지 (2026.05.27 상장) · SK하이닉스 주가는 레버리지 ETF 일별수익률÷2로 역산 · 데이터: ETF데이터 · 상기 자료는 이해를 돕기 위한 예시입니다.</a:t>
+              <a:t>※ 전 구간 실제값 (수정주가 기준) · KODEX 200/KODEX 레버리지·KODEX SK하이닉스단일종목레버리지(2026.05.27 상장): ETF데이터 · SK하이닉스 주가: DataGuide (2026.08.14 기준) · 상기 자료는 이해를 돕기 위한 예시입니다.</a:t>
             </a:r>
           </a:p>
         </p:txBody>
@@ -24208,7 +24208,7 @@
       </p:pic>
       <p:pic>
         <p:nvPicPr>
-          <p:cNvPr id="5" name="Picture 4" descr="lev15_k200flat.png"/>
+          <p:cNvPr id="5" name="Picture 4" descr="image.png"/>
           <p:cNvPicPr>
             <a:picLocks noChangeAspect="1"/>
           </p:cNvPicPr>
@@ -24232,7 +24232,7 @@
       </p:pic>
       <p:pic>
         <p:nvPicPr>
-          <p:cNvPr id="6" name="Picture 5" descr="lev15_k200trend.png"/>
+          <p:cNvPr id="6" name="Picture 5" descr="image.png"/>
           <p:cNvPicPr>
             <a:picLocks noChangeAspect="1"/>
           </p:cNvPicPr>

--- a/제안서/IT_TOP10_스마트액티브레버리지15_v1_20260812.pptx
+++ b/제안서/IT_TOP10_스마트액티브레버리지15_v1_20260812.pptx
@@ -23928,7 +23928,7 @@
           <p:nvPr/>
         </p:nvPicPr>
         <p:blipFill>
-          <a:blip r:embed="rId7"/>
+          <a:blip r:embed="rId3"/>
           <a:stretch>
             <a:fillRect/>
           </a:stretch>
@@ -23952,7 +23952,7 @@
           <p:nvPr/>
         </p:nvPicPr>
         <p:blipFill>
-          <a:blip r:embed="rId12"/>
+          <a:blip r:embed="rId4"/>
           <a:stretch>
             <a:fillRect/>
           </a:stretch>
@@ -23976,7 +23976,7 @@
           <p:nvPr/>
         </p:nvPicPr>
         <p:blipFill>
-          <a:blip r:embed="rId14"/>
+          <a:blip r:embed="rId5"/>
           <a:stretch>
             <a:fillRect/>
           </a:stretch>
@@ -24177,14 +24177,38 @@
                   <a:srgbClr val="222222"/>
                 </a:solidFill>
               </a:rPr>
-              <a:t>레버리지는 '일별 수익률의 2배(1.5배)'를 맞추려 매일 오른 날 더 사고(고가 매수) 내린 날 팝니다(저가 매도). 지수가 2배 갔다 제자리면 0이 되고, 하루 +10% 갔다 제자리만 와도 -1.8% — 이 손실이 등락마다 복리로 쌓입니다.</a:t>
+              <a:t>레버리지는 '일별 수익률의 2배(1.5배)'를 맞추려 매일 오른 날 더 사고(고가 매수), 내린 날 팝니다(저가 매도). 시장이 2배 갔다 제자리로 오면 순자산은 0 — 하루 +10% 후 제자리만 와도 -1.8%이며, 이 손실은 등락마다 복리로 쌓입니다. 반대로 한 방향 추세에서는 일별 복리가 단순 배수보다 유리하게 작동합니다.</a:t>
             </a:r>
           </a:p>
         </p:txBody>
       </p:sp>
       <p:pic>
         <p:nvPicPr>
-          <p:cNvPr id="4" name="Picture 3" descr="image.png"/>
+          <p:cNvPr id="4" name="Picture 3" descr="lev15_arith0.png"/>
+          <p:cNvPicPr>
+            <a:picLocks noChangeAspect="1"/>
+          </p:cNvPicPr>
+          <p:nvPr/>
+        </p:nvPicPr>
+        <p:blipFill>
+          <a:blip r:embed="rId6"/>
+          <a:stretch>
+            <a:fillRect/>
+          </a:stretch>
+        </p:blipFill>
+        <p:spPr>
+          <a:xfrm>
+            <a:off x="411480" y="1920240"/>
+            <a:ext cx="2942336" cy="2677169"/>
+          </a:xfrm>
+          <a:prstGeom prst="rect">
+            <a:avLst/>
+          </a:prstGeom>
+        </p:spPr>
+      </p:pic>
+      <p:pic>
+        <p:nvPicPr>
+          <p:cNvPr id="5" name="Picture 4" descr="image.png"/>
           <p:cNvPicPr>
             <a:picLocks noChangeAspect="1"/>
           </p:cNvPicPr>
@@ -24198,31 +24222,7 @@
         </p:blipFill>
         <p:spPr>
           <a:xfrm>
-            <a:off x="411480" y="1783080"/>
-            <a:ext cx="2942336" cy="2783291"/>
-          </a:xfrm>
-          <a:prstGeom prst="rect">
-            <a:avLst/>
-          </a:prstGeom>
-        </p:spPr>
-      </p:pic>
-      <p:pic>
-        <p:nvPicPr>
-          <p:cNvPr id="5" name="Picture 4" descr="image.png"/>
-          <p:cNvPicPr>
-            <a:picLocks noChangeAspect="1"/>
-          </p:cNvPicPr>
-          <p:nvPr/>
-        </p:nvPicPr>
-        <p:blipFill>
-          <a:blip r:embed="rId7"/>
-          <a:stretch>
-            <a:fillRect/>
-          </a:stretch>
-        </p:blipFill>
-        <p:spPr>
-          <a:xfrm>
-            <a:off x="3481832" y="1783080"/>
+            <a:off x="3481832" y="1920240"/>
             <a:ext cx="2942336" cy="2677169"/>
           </a:xfrm>
           <a:prstGeom prst="rect">
@@ -24239,14 +24239,14 @@
           <p:nvPr/>
         </p:nvPicPr>
         <p:blipFill>
-          <a:blip r:embed="rId8"/>
+          <a:blip r:embed="rId5"/>
           <a:stretch>
             <a:fillRect/>
           </a:stretch>
         </p:blipFill>
         <p:spPr>
           <a:xfrm>
-            <a:off x="6552184" y="1783080"/>
+            <a:off x="6552184" y="1920240"/>
             <a:ext cx="2942336" cy="2677169"/>
           </a:xfrm>
           <a:prstGeom prst="rect">
@@ -24288,7 +24288,7 @@
                 </a:solidFill>
                 <a:latin typeface="KoPub돋움체_Pro Bold"/>
               </a:rPr>
-              <a:t>등락 반복에선 지수가 제자리여도 녹아내리고, 강하고 꾸준한 추세일 때만 진가 — 문제는 그런 추세가 드물다는 것입니다.</a:t>
+              <a:t>방향이 아니라 '경로'가 성과를 결정합니다 — 왕복 구간에서는 제자리여도 손실이 쌓이고, 추세 구간에서는 복리가 유리합니다.</a:t>
             </a:r>
           </a:p>
         </p:txBody>
@@ -24327,7 +24327,7 @@
                 </a:solidFill>
                 <a:latin typeface="KoPub돋움체_Pro Medium"/>
               </a:rPr>
-              <a:t>※ KODEX 200·KODEX 레버리지 수정주가 실측 (제자리 사례 2026.02.26~04.16, 추세 사례 2026.03.31~05.29) · 단순 2배 = 기초 누적수익률×2 (가상) · '하루 +10% 후 제자리 = -1.8%'는 2배 레버리지 산술 예시 · 데이터: ETF데이터</a:t>
+              <a:t>※ KODEX 200·KODEX 레버리지 수정주가 실측 (제자리 사례 2026.02.26~04.16, 추세 사례 2026.03.31~05.29) · 단순 2배 = 기초 누적수익률×2 (가상) · '시장 2배 후 제자리 = 0'과 '하루 +10% 후 제자리 = -1.8%'는 2배 레버리지 산술 · 데이터: ETF데이터</a:t>
             </a:r>
           </a:p>
         </p:txBody>
@@ -24454,7 +24454,7 @@
           <p:nvPr/>
         </p:nvPicPr>
         <p:blipFill>
-          <a:blip r:embed="rId4"/>
+          <a:blip r:embed="rId3"/>
           <a:stretch>
             <a:fillRect/>
           </a:stretch>
